--- a/Foundation_F6/Workshop/F6-W01_Apply_Workshop_L01-L02_At_the_Tourist_Information_Desk.pptx
+++ b/Foundation_F6/Workshop/F6-W01_Apply_Workshop_L01-L02_At_the_Tourist_Information_Desk.pptx
@@ -7436,7 +7436,7 @@
                 <a:latin typeface="Calibri" pitchFamily="34" charset="0"/>
                 <a:cs typeface="Amiri" pitchFamily="2" charset="-78"/>
               </a:rPr>
-              <a:t>Odd numbers come from F6-L01, even numbers from F6-L02. Core: a full sentence from the starter. Develop: add the “more” part. Stretch: link two answers with </a:t>
+              <a:t>Odd numbers come from F6-L01, even numbers from F6-L02. Core: a full sentence from the starter. Develop: add the “more” part. Stretch: link two answers with ‏</a:t>
             </a:r>
             <a:pPr algn="l" indent="0" marL="0">
               <a:buNone/>
@@ -7463,7 +7463,7 @@
                 <a:latin typeface="Calibri" pitchFamily="34" charset="0"/>
                 <a:cs typeface="Amiri" pitchFamily="2" charset="-78"/>
               </a:rPr>
-              <a:t>, </a:t>
+              <a:t>‏, ‏</a:t>
             </a:r>
             <a:pPr algn="l" indent="0" marL="0">
               <a:buNone/>
@@ -7490,7 +7490,7 @@
                 <a:latin typeface="Calibri" pitchFamily="34" charset="0"/>
                 <a:cs typeface="Amiri" pitchFamily="2" charset="-78"/>
               </a:rPr>
-              <a:t> or </a:t>
+              <a:t>‏ or ‏</a:t>
             </a:r>
             <a:pPr algn="l" indent="0" marL="0">
               <a:buNone/>
@@ -7517,7 +7517,7 @@
                 <a:latin typeface="Calibri" pitchFamily="34" charset="0"/>
                 <a:cs typeface="Amiri" pitchFamily="2" charset="-78"/>
               </a:rPr>
-              <a:t>. Swap after each question.</a:t>
+              <a:t>‏. Swap after each question.</a:t>
             </a:r>
             <a:endParaRPr lang="en-US" sz="1100" dirty="0"/>
           </a:p>
@@ -10840,7 +10840,7 @@
                 <a:latin typeface="Calibri" pitchFamily="34" charset="0"/>
                 <a:cs typeface="Amiri" pitchFamily="2" charset="-78"/>
               </a:rPr>
-              <a:t>Use three positions: </a:t>
+              <a:t>Use three positions: ‏</a:t>
             </a:r>
             <a:pPr algn="l" indent="0" marL="0">
               <a:buNone/>
@@ -10921,7 +10921,7 @@
                 <a:latin typeface="Calibri" pitchFamily="34" charset="0"/>
                 <a:cs typeface="Amiri" pitchFamily="2" charset="-78"/>
               </a:rPr>
-              <a:t>…</a:t>
+              <a:t>…‏</a:t>
             </a:r>
             <a:endParaRPr lang="en-US" sz="1150" dirty="0"/>
           </a:p>
@@ -11058,7 +11058,7 @@
                 <a:latin typeface="Calibri" pitchFamily="34" charset="0"/>
                 <a:cs typeface="Amiri" pitchFamily="2" charset="-78"/>
               </a:rPr>
-              <a:t>Add </a:t>
+              <a:t>Add ‏</a:t>
             </a:r>
             <a:pPr algn="l" indent="0" marL="0">
               <a:buNone/>
@@ -11112,7 +11112,7 @@
                 <a:latin typeface="Calibri" pitchFamily="34" charset="0"/>
                 <a:cs typeface="Amiri" pitchFamily="2" charset="-78"/>
               </a:rPr>
-              <a:t> with the right agreement, and your favourite place.</a:t>
+              <a:t>‏ with the right agreement, and your favourite place.</a:t>
             </a:r>
             <a:endParaRPr lang="en-US" sz="1150" dirty="0"/>
           </a:p>
@@ -17570,7 +17570,7 @@
                 <a:latin typeface="Calibri" pitchFamily="34" charset="0"/>
                 <a:cs typeface="Amiri" pitchFamily="2" charset="-78"/>
               </a:rPr>
-              <a:t>Feminine → </a:t>
+              <a:t>Feminine → ‏</a:t>
             </a:r>
             <a:pPr algn="l" indent="0" marL="0">
               <a:buNone/>
@@ -17597,7 +17597,7 @@
                 <a:latin typeface="Calibri" pitchFamily="34" charset="0"/>
                 <a:cs typeface="Amiri" pitchFamily="2" charset="-78"/>
               </a:rPr>
-              <a:t>.</a:t>
+              <a:t>‏.</a:t>
             </a:r>
             <a:endParaRPr lang="en-US" sz="1150" dirty="0"/>
           </a:p>
@@ -17808,7 +17808,7 @@
                 <a:latin typeface="Calibri" pitchFamily="34" charset="0"/>
                 <a:cs typeface="Amiri" pitchFamily="2" charset="-78"/>
               </a:rPr>
-              <a:t>Feminine → </a:t>
+              <a:t>Feminine → ‏</a:t>
             </a:r>
             <a:pPr algn="l" indent="0" marL="0">
               <a:buNone/>
@@ -17835,7 +17835,7 @@
                 <a:latin typeface="Calibri" pitchFamily="34" charset="0"/>
                 <a:cs typeface="Amiri" pitchFamily="2" charset="-78"/>
               </a:rPr>
-              <a:t>.</a:t>
+              <a:t>‏.</a:t>
             </a:r>
             <a:endParaRPr lang="en-US" sz="1150" dirty="0"/>
           </a:p>
@@ -18046,7 +18046,7 @@
                 <a:latin typeface="Calibri" pitchFamily="34" charset="0"/>
                 <a:cs typeface="Amiri" pitchFamily="2" charset="-78"/>
               </a:rPr>
-              <a:t>Use </a:t>
+              <a:t>Use ‏</a:t>
             </a:r>
             <a:pPr algn="l" indent="0" marL="0">
               <a:buNone/>
@@ -18073,7 +18073,7 @@
                 <a:latin typeface="Calibri" pitchFamily="34" charset="0"/>
                 <a:cs typeface="Amiri" pitchFamily="2" charset="-78"/>
               </a:rPr>
-              <a:t> with the verb </a:t>
+              <a:t>‏ with the verb ‏</a:t>
             </a:r>
             <a:pPr algn="l" indent="0" marL="0">
               <a:buNone/>
@@ -18100,7 +18100,7 @@
                 <a:latin typeface="Calibri" pitchFamily="34" charset="0"/>
                 <a:cs typeface="Amiri" pitchFamily="2" charset="-78"/>
               </a:rPr>
-              <a:t>.</a:t>
+              <a:t>‏.</a:t>
             </a:r>
             <a:endParaRPr lang="en-US" sz="1150" dirty="0"/>
           </a:p>
@@ -20148,7 +20148,7 @@
                 <a:latin typeface="Calibri" pitchFamily="34" charset="0"/>
                 <a:cs typeface="Amiri" pitchFamily="2" charset="-78"/>
               </a:rPr>
-              <a:t>Write a short visitor’s guide (about 45–65 words). Include: • the name of your town and whether it is a city, town or village • five places with </a:t>
+              <a:t>Write a short visitor’s guide (about 45–65 words). Include: • the name of your town and whether it is a city, town or village • five places with ‏</a:t>
             </a:r>
             <a:pPr algn="l" indent="0" marL="0">
               <a:buNone/>
@@ -20175,7 +20175,7 @@
                 <a:latin typeface="Calibri" pitchFamily="34" charset="0"/>
                 <a:cs typeface="Amiri" pitchFamily="2" charset="-78"/>
               </a:rPr>
-              <a:t> • one place that is not there • where three places are, with different position words • one place near and one far from the station • the place you recommend and why.</a:t>
+              <a:t>‏ • one place that is not there • where three places are, with different position words • one place near and one far from the station • the place you recommend and why.</a:t>
             </a:r>
             <a:endParaRPr lang="en-US" sz="1100" dirty="0"/>
           </a:p>
@@ -20327,7 +20327,7 @@
                 <a:latin typeface="Calibri" pitchFamily="34" charset="0"/>
                 <a:cs typeface="Amiri" pitchFamily="2" charset="-78"/>
               </a:rPr>
-              <a:t>☐  At least one </a:t>
+              <a:t>☐  At least one ‏</a:t>
             </a:r>
             <a:pPr algn="l" indent="0" marL="0">
               <a:buNone/>
@@ -20354,7 +20354,7 @@
                 <a:latin typeface="Calibri" pitchFamily="34" charset="0"/>
                 <a:cs typeface="Amiri" pitchFamily="2" charset="-78"/>
               </a:rPr>
-              <a:t> and one </a:t>
+              <a:t>‏ and one ‏</a:t>
             </a:r>
             <a:pPr algn="l" indent="0" marL="0">
               <a:buNone/>
@@ -20381,7 +20381,7 @@
                 <a:latin typeface="Calibri" pitchFamily="34" charset="0"/>
                 <a:cs typeface="Amiri" pitchFamily="2" charset="-78"/>
               </a:rPr>
-              <a:t> (Develop).</a:t>
+              <a:t>‏ (Develop).</a:t>
             </a:r>
             <a:endParaRPr lang="en-US" sz="1200" dirty="0"/>
           </a:p>
@@ -23705,7 +23705,7 @@
                 <a:latin typeface="Calibri" pitchFamily="34" charset="0"/>
                 <a:cs typeface="Amiri" pitchFamily="2" charset="-78"/>
               </a:rPr>
-              <a:t>choose </a:t>
+              <a:t>choose ‏</a:t>
             </a:r>
             <a:pPr algn="l" indent="0" marL="0">
               <a:buNone/>
@@ -23732,7 +23732,7 @@
                 <a:latin typeface="Calibri" pitchFamily="34" charset="0"/>
                 <a:cs typeface="Amiri" pitchFamily="2" charset="-78"/>
               </a:rPr>
-              <a:t> by the place word?</a:t>
+              <a:t>‏ by the place word?</a:t>
             </a:r>
             <a:endParaRPr lang="en-US" sz="1100" dirty="0"/>
           </a:p>
@@ -23956,7 +23956,7 @@
                 <a:latin typeface="Calibri" pitchFamily="34" charset="0"/>
                 <a:cs typeface="Amiri" pitchFamily="2" charset="-78"/>
               </a:rPr>
-              <a:t>agree near / far with the place (</a:t>
+              <a:t>agree near / far with the place (‏</a:t>
             </a:r>
             <a:pPr algn="l" indent="0" marL="0">
               <a:buNone/>
@@ -23983,7 +23983,7 @@
                 <a:latin typeface="Calibri" pitchFamily="34" charset="0"/>
                 <a:cs typeface="Amiri" pitchFamily="2" charset="-78"/>
               </a:rPr>
-              <a:t>) and use </a:t>
+              <a:t>‏) and use ‏</a:t>
             </a:r>
             <a:pPr algn="l" indent="0" marL="0">
               <a:buNone/>
@@ -24010,7 +24010,7 @@
                 <a:latin typeface="Calibri" pitchFamily="34" charset="0"/>
                 <a:cs typeface="Amiri" pitchFamily="2" charset="-78"/>
               </a:rPr>
-              <a:t>…?</a:t>
+              <a:t>…‏?</a:t>
             </a:r>
             <a:endParaRPr lang="en-US" sz="1100" dirty="0"/>
           </a:p>
@@ -24169,7 +24169,7 @@
                 <a:latin typeface="Calibri" pitchFamily="34" charset="0"/>
                 <a:cs typeface="Amiri" pitchFamily="2" charset="-78"/>
               </a:rPr>
-              <a:t>use linking words (</a:t>
+              <a:t>use linking words (‏</a:t>
             </a:r>
             <a:pPr algn="l" indent="0" marL="0">
               <a:buNone/>
@@ -24277,7 +24277,7 @@
                 <a:latin typeface="Calibri" pitchFamily="34" charset="0"/>
                 <a:cs typeface="Amiri" pitchFamily="2" charset="-78"/>
               </a:rPr>
-              <a:t>)?</a:t>
+              <a:t>‏)?</a:t>
             </a:r>
             <a:endParaRPr lang="en-US" sz="1100" dirty="0"/>
           </a:p>
@@ -28223,7 +28223,7 @@
                 <a:latin typeface="Calibri" pitchFamily="34" charset="0"/>
                 <a:cs typeface="Amiri" pitchFamily="2" charset="-78"/>
               </a:rPr>
-              <a:t>I added reasons (</a:t>
+              <a:t>I added reasons (‏</a:t>
             </a:r>
             <a:pPr algn="l" indent="0" marL="0">
               <a:buNone/>
@@ -28250,7 +28250,7 @@
                 <a:latin typeface="Calibri" pitchFamily="34" charset="0"/>
                 <a:cs typeface="Amiri" pitchFamily="2" charset="-78"/>
               </a:rPr>
-              <a:t>) and extra details without frames.</a:t>
+              <a:t>‏) and extra details without frames.</a:t>
             </a:r>
             <a:endParaRPr lang="en-US" sz="1300" dirty="0"/>
           </a:p>
@@ -32378,7 +32378,7 @@
                 <a:latin typeface="Calibri" pitchFamily="34" charset="0"/>
                 <a:cs typeface="Amiri" pitchFamily="2" charset="-78"/>
               </a:rPr>
-              <a:t>☐  Add a reason (</a:t>
+              <a:t>☐  Add a reason (‏</a:t>
             </a:r>
             <a:pPr algn="l" indent="0" marL="0">
               <a:buNone/>
@@ -32405,7 +32405,7 @@
                 <a:latin typeface="Calibri" pitchFamily="34" charset="0"/>
                 <a:cs typeface="Amiri" pitchFamily="2" charset="-78"/>
               </a:rPr>
-              <a:t>) and an extra detail to every point.</a:t>
+              <a:t>‏) and an extra detail to every point.</a:t>
             </a:r>
             <a:endParaRPr lang="en-US" sz="1300" dirty="0"/>
           </a:p>
@@ -33926,7 +33926,7 @@
                 <a:latin typeface="Calibri" pitchFamily="34" charset="0"/>
                 <a:cs typeface="Amiri" pitchFamily="2" charset="-78"/>
               </a:rPr>
-              <a:t>Join a word from each lesson in one sentence with </a:t>
+              <a:t>Join a word from each lesson in one sentence with ‏</a:t>
             </a:r>
             <a:pPr algn="l" indent="0" marL="0">
               <a:buNone/>
@@ -33953,7 +33953,7 @@
                 <a:latin typeface="Calibri" pitchFamily="34" charset="0"/>
                 <a:cs typeface="Amiri" pitchFamily="2" charset="-78"/>
               </a:rPr>
-              <a:t> or </a:t>
+              <a:t>‏ or ‏</a:t>
             </a:r>
             <a:pPr algn="l" indent="0" marL="0">
               <a:buNone/>
@@ -33980,7 +33980,7 @@
                 <a:latin typeface="Calibri" pitchFamily="34" charset="0"/>
                 <a:cs typeface="Amiri" pitchFamily="2" charset="-78"/>
               </a:rPr>
-              <a:t>.</a:t>
+              <a:t>‏.</a:t>
             </a:r>
             <a:endParaRPr lang="en-US" sz="1150" dirty="0"/>
           </a:p>
